--- a/anthonypoolemicrous_latest.pptx
+++ b/anthonypoolemicrous_latest.pptx
@@ -457,13 +457,15 @@
             <a:r>
               <a:t>[Let the slide breathe. A beat of silence before you speak.]</a:t>
             </a:r>
-          </a:p>
-          <a:p>
-            <a:endParaRPr/>
-          </a:p>
-          <a:p>
-            <a:r>
-              <a:t>What if the twin could think? A digital twin that doesn't just mirror a system — it reasons about it. It plans. It acts. Not replacing the engineer. Giving the engineer a partner that never sleeps and never loses context.</a:t>
+            <a:br/>
+            <a:br/>
+            <a:r>
+              <a:t>What if the twin could think? Not just mirror a system — reason about it. Plan a response. And then actually execute it.</a:t>
+            </a:r>
+            <a:br/>
+            <a:br/>
+            <a:r>
+              <a:t>A digital twin that detects a thermal anomaly, traces it to a degrading component, reroutes production, and schedules the fix — all autonomously. Not replacing the engineer. Giving the engineer a partner that never sleeps, never loses context, and doesn't wait for permission to solve problems it already understands.</a:t>
             </a:r>
           </a:p>
         </p:txBody>
@@ -533,15 +535,12 @@
           <a:lstStyle/>
           <a:p>
             <a:r>
-              <a:t>It's a control loop — something every engineer in this room already thinks in. Perceive — ingest data. Reason — identify what's happening and why. Plan — build a response. Act — execute through connected systems. Reflect — evaluate the outcome.</a:t>
-            </a:r>
-          </a:p>
-          <a:p>
-            <a:endParaRPr/>
-          </a:p>
-          <a:p>
-            <a:r>
-              <a:t>Remember that engineer at 2 AM? An agentic twin wouldn't have just detected the drift. It would have pulled historical patterns, identified the failing element, and scheduled the repair. Minutes, not hours.</a:t>
+              <a:t>It's a control loop — something every engineer in this room already thinks in. Perceive — ingest data from sensors and telemetry. Reason — identify what's happening and why. Plan — build a response strategy. Act — and this is the key word — actually execute. Not recommend. Not alert. Execute. Reroute load. Push a patch. Shut down a line. Swap to a backup. Reflect — evaluate the outcome and learn from it.</a:t>
+            </a:r>
+            <a:br/>
+            <a:br/>
+            <a:r>
+              <a:t>Remember that engineer at 2 AM? An agentic twin wouldn't have just detected the drift. It would have diagnosed, acted, and resolved — end to end. The engineer wakes up to a resolution report, not an alarm.</a:t>
             </a:r>
           </a:p>
         </p:txBody>
@@ -689,13 +688,20 @@
           <a:lstStyle/>
           <a:p>
             <a:r>
-              <a:t>IBM published a paper at AAAI 2025 on agentic digital twins for shipping fleet management. XMPro has a multi-agent system in production — reporting 30–40% reductions in unplanned downtime. And Nature Computational Science published a formal evolutionary framework this year.</a:t>
-            </a:r>
-          </a:p>
-          <a:p>
-            <a:endParaRPr/>
-          </a:p>
-          <a:p>
+              <a:t>This isn't theoretical anymore. IBM published a paper at AAAI 2025 on agentic digital twins for shipping fleet management — agents that autonomously plan, execute, and reflect. Not copilots. Full agents.</a:t>
+            </a:r>
+            <a:br/>
+            <a:br/>
+            <a:r>
+              <a:t>XMPro has a multi-agent system in production for manufacturing — they report that they can achieve 30 to 40 percent reductions in unplanned downtime.</a:t>
+            </a:r>
+            <a:br/>
+            <a:br/>
+            <a:r>
+              <a:t>And Nature Computational Science published a formal evolutionary framework this year that maps digital twins from reactive all the way to autonomous — the same trajectory we just walked through.</a:t>
+            </a:r>
+            <a:br/>
+            <a:br/>
             <a:r>
               <a:t>This went from idea to research to production faster than most people realize.</a:t>
             </a:r>
@@ -767,15 +773,17 @@
           <a:lstStyle/>
           <a:p>
             <a:r>
-              <a:t>The architecture that's emerging isn't one giant AI doing everything. It's specialized agents working together. A monitor that detects. An analyst that finds root causes. A planner that schedules the response. They collaborate — and critically — they check each other's work. The agent that proposes is never the one that approves.</a:t>
-            </a:r>
-          </a:p>
-          <a:p>
-            <a:endParaRPr/>
-          </a:p>
-          <a:p>
-            <a:r>
-              <a:t>If that sounds like how a good engineering team works — it is.</a:t>
+              <a:t>The architecture that's emerging isn't one giant AI doing everything. It's specialized agents working together. A monitor that detects anomalies. An analyst that finds root causes. A planner that schedules and executes the response.</a:t>
+            </a:r>
+            <a:br/>
+            <a:br/>
+            <a:r>
+              <a:t>They collaborate — and critically — they check each other's work. The agent that proposes is never the one that approves. That's not just good AI design. That's how you build trust in autonomous systems.</a:t>
+            </a:r>
+            <a:br/>
+            <a:br/>
+            <a:r>
+              <a:t>If that sounds like how a good engineering team works — it should. That's the whole point.</a:t>
             </a:r>
           </a:p>
         </p:txBody>
@@ -1323,7 +1331,7 @@
           <a:lstStyle/>
           <a:p>
             <a:r>
-              <a:t>So let's make sure we're starting from the same place. A digital twin — at its core — is a virtual model that stays continuously synced with a physical system. Data flows in from sensors. Simulations flow back. "Most of you know this better than I do. I'm not here to explain digital twins to you. I'm here to talk about what comes next."</a:t>
+              <a:t>So let's make sure we're starting from the same place. A digital twin — at its core — is a virtual model that stays continuously synced with a physical system. Data flows in from sensors. Simulations flow back. The idea goes back further than most people realize — all the way to NASA, 1970, Apollo 13. A mirror of something real, used to make life-or-death decisions. We've come a long way since then, but the core concept? Exactly the same.</a:t>
             </a:r>
           </a:p>
         </p:txBody>
@@ -1466,21 +1474,30 @@
             <a:r>
               <a:t>[BUILD ANIMATION — click through generations one at a time.]</a:t>
             </a:r>
-          </a:p>
-          <a:p>
-            <a:endParaRPr/>
-          </a:p>
-          <a:p>
-            <a:r>
-              <a:t>Digital twins have been evolving. Gen 1 was static — a 3D model, a schematic. Gen 2 was reactive — something went wrong, here's an alert. Gen 3 — where a lot of you are or are heading — is predictive.</a:t>
-            </a:r>
-          </a:p>
-          <a:p>
-            <a:endParaRPr/>
-          </a:p>
-          <a:p>
-            <a:r>
-              <a:t>But notice — every generation gets smarter about what's happening. None of them do anything about it.</a:t>
+            <a:br/>
+            <a:br/>
+            <a:r>
+              <a:t>Let me walk you through this with one example — NASA — because it maps perfectly.</a:t>
+            </a:r>
+            <a:br/>
+            <a:br/>
+            <a:r>
+              <a:t>Gen one: static. Apollo 13, 1970. Engineers in Houston had a physical replica of the spacecraft on the ground. When the oxygen tank exploded, they ran scenarios on that replica by hand — swapping components, testing procedures — to figure out how to bring the crew home. That was the first digital twin. Except it wasn't digital at all. It was a physical mirror of something real, and engineers had to manually work through every possibility.</a:t>
+            </a:r>
+            <a:br/>
+            <a:br/>
+            <a:r>
+              <a:t>Gen two: reactive. Fast forward to the Space Shuttle era. Now NASA has sensor telemetry streaming down in real time. The twin is digital — software models connected to live data. When a thermal tile shows anomalous readings, the system flags it. Something went wrong, here's an alert. That's a massive leap from Apollo — but the system still just tells you there's a problem. A human still has to figure out what to do about it.</a:t>
+            </a:r>
+            <a:br/>
+            <a:br/>
+            <a:r>
+              <a:t>Gen three: predictive. This is where NASA is today with the ISS and Artemis. Machine learning models trained on decades of operational data. The twin doesn't wait for something to break — it watches trends, compares against historical patterns, and tells you: this component will likely fail in the next seventy-two hours. That's incredibly powerful. Most of you are here or heading here.</a:t>
+            </a:r>
+            <a:br/>
+            <a:br/>
+            <a:r>
+              <a:t>But notice the pattern. Each generation gets smarter about what's happening. None of them do anything about it. Apollo — engineers had to solve it themselves. Shuttle — engineers got an alert and had to solve it themselves. ISS — engineers get an early warning and still have to solve it themselves. The human is always the one who diagnoses, decides, and acts.</a:t>
             </a:r>
           </a:p>
         </p:txBody>
@@ -1628,26 +1645,22 @@
           <a:lstStyle/>
           <a:p>
             <a:r>
-              <a:rPr dirty="0"/>
               <a:t>[Slow. Conversational. Like you're telling a friend.]</a:t>
             </a:r>
-          </a:p>
-          <a:p>
-            <a:endParaRPr dirty="0"/>
-          </a:p>
-          <a:p>
-            <a:r>
-              <a:rPr dirty="0"/>
+            <a:br/>
+            <a:br/>
+            <a:r>
               <a:t>You're a process engineer at a fab. It's 2:14 AM. Something shifts — temperature drift, vibration spike. Your monitoring system catches it instantly. You? You're asleep. By the time you wake up, understand what happened, track down the part — five, six hours have passed.</a:t>
             </a:r>
-          </a:p>
-          <a:p>
-            <a:endParaRPr dirty="0"/>
-          </a:p>
-          <a:p>
-            <a:r>
-              <a:rPr dirty="0"/>
-              <a:t>The system detected it in seconds. It took the better part of a shift. Detection and action are two completely different problems.</a:t>
+            <a:br/>
+            <a:br/>
+            <a:r>
+              <a:t>The system detected it in seconds. The response took the better part of a shift. Now imagine a different version of that story. Same drift. Same 2:14 AM. But this time, the system doesn't just detect it — it diagnoses the cause, pulls historical patterns, identifies the failing component, reroutes production around it, and schedules the replacement. By the time you wake up, it's already handled. You're reviewing the outcome, not triaging the problem.</a:t>
+            </a:r>
+            <a:br/>
+            <a:br/>
+            <a:r>
+              <a:t>That's the gap we're going to close today.</a:t>
             </a:r>
           </a:p>
         </p:txBody>
@@ -2015,7 +2028,7 @@
           <a:p>
             <a:fld id="{5BCAD085-E8A6-8845-BD4E-CB4CCA059FC4}" type="datetimeFigureOut">
               <a:rPr lang="en-US" smtClean="0"/>
-              <a:t>4/10/2026</a:t>
+              <a:t>4/13/2026</a:t>
             </a:fld>
             <a:endParaRPr lang="en-US"/>
           </a:p>
@@ -2183,7 +2196,7 @@
           <a:p>
             <a:fld id="{5BCAD085-E8A6-8845-BD4E-CB4CCA059FC4}" type="datetimeFigureOut">
               <a:rPr lang="en-US" smtClean="0"/>
-              <a:t>4/10/2026</a:t>
+              <a:t>4/13/2026</a:t>
             </a:fld>
             <a:endParaRPr lang="en-US"/>
           </a:p>
@@ -2361,7 +2374,7 @@
           <a:p>
             <a:fld id="{5BCAD085-E8A6-8845-BD4E-CB4CCA059FC4}" type="datetimeFigureOut">
               <a:rPr lang="en-US" smtClean="0"/>
-              <a:t>4/10/2026</a:t>
+              <a:t>4/13/2026</a:t>
             </a:fld>
             <a:endParaRPr lang="en-US"/>
           </a:p>
@@ -2529,7 +2542,7 @@
           <a:p>
             <a:fld id="{5BCAD085-E8A6-8845-BD4E-CB4CCA059FC4}" type="datetimeFigureOut">
               <a:rPr lang="en-US" smtClean="0"/>
-              <a:t>4/10/2026</a:t>
+              <a:t>4/13/2026</a:t>
             </a:fld>
             <a:endParaRPr lang="en-US"/>
           </a:p>
@@ -2774,7 +2787,7 @@
           <a:p>
             <a:fld id="{5BCAD085-E8A6-8845-BD4E-CB4CCA059FC4}" type="datetimeFigureOut">
               <a:rPr lang="en-US" smtClean="0"/>
-              <a:t>4/10/2026</a:t>
+              <a:t>4/13/2026</a:t>
             </a:fld>
             <a:endParaRPr lang="en-US"/>
           </a:p>
@@ -3059,7 +3072,7 @@
           <a:p>
             <a:fld id="{5BCAD085-E8A6-8845-BD4E-CB4CCA059FC4}" type="datetimeFigureOut">
               <a:rPr lang="en-US" smtClean="0"/>
-              <a:t>4/10/2026</a:t>
+              <a:t>4/13/2026</a:t>
             </a:fld>
             <a:endParaRPr lang="en-US"/>
           </a:p>
@@ -3478,7 +3491,7 @@
           <a:p>
             <a:fld id="{5BCAD085-E8A6-8845-BD4E-CB4CCA059FC4}" type="datetimeFigureOut">
               <a:rPr lang="en-US" smtClean="0"/>
-              <a:t>4/10/2026</a:t>
+              <a:t>4/13/2026</a:t>
             </a:fld>
             <a:endParaRPr lang="en-US"/>
           </a:p>
@@ -3595,7 +3608,7 @@
           <a:p>
             <a:fld id="{5BCAD085-E8A6-8845-BD4E-CB4CCA059FC4}" type="datetimeFigureOut">
               <a:rPr lang="en-US" smtClean="0"/>
-              <a:t>4/10/2026</a:t>
+              <a:t>4/13/2026</a:t>
             </a:fld>
             <a:endParaRPr lang="en-US"/>
           </a:p>
@@ -3690,7 +3703,7 @@
           <a:p>
             <a:fld id="{5BCAD085-E8A6-8845-BD4E-CB4CCA059FC4}" type="datetimeFigureOut">
               <a:rPr lang="en-US" smtClean="0"/>
-              <a:t>4/10/2026</a:t>
+              <a:t>4/13/2026</a:t>
             </a:fld>
             <a:endParaRPr lang="en-US"/>
           </a:p>
@@ -3965,7 +3978,7 @@
           <a:p>
             <a:fld id="{5BCAD085-E8A6-8845-BD4E-CB4CCA059FC4}" type="datetimeFigureOut">
               <a:rPr lang="en-US" smtClean="0"/>
-              <a:t>4/10/2026</a:t>
+              <a:t>4/13/2026</a:t>
             </a:fld>
             <a:endParaRPr lang="en-US"/>
           </a:p>
@@ -4217,7 +4230,7 @@
           <a:p>
             <a:fld id="{5BCAD085-E8A6-8845-BD4E-CB4CCA059FC4}" type="datetimeFigureOut">
               <a:rPr lang="en-US" smtClean="0"/>
-              <a:t>4/10/2026</a:t>
+              <a:t>4/13/2026</a:t>
             </a:fld>
             <a:endParaRPr lang="en-US"/>
           </a:p>
@@ -4428,7 +4441,7 @@
           <a:p>
             <a:fld id="{5BCAD085-E8A6-8845-BD4E-CB4CCA059FC4}" type="datetimeFigureOut">
               <a:rPr lang="en-US" smtClean="0"/>
-              <a:t>4/10/2026</a:t>
+              <a:t>4/13/2026</a:t>
             </a:fld>
             <a:endParaRPr lang="en-US"/>
           </a:p>
@@ -4989,7 +5002,7 @@
         <p:spPr>
           <a:xfrm>
             <a:off x="1371600" y="5532120"/>
-            <a:ext cx="5486400" cy="365760"/>
+            <a:ext cx="5486400" cy="307777"/>
           </a:xfrm>
           <a:prstGeom prst="rect">
             <a:avLst/>
@@ -5011,7 +5024,16 @@
               </a:defRPr>
             </a:pPr>
             <a:r>
-              <a:t>Microelectronics US 2026  ·  Embedded Systems Stage  ·  April 22</a:t>
+              <a:rPr dirty="0"/>
+              <a:t>Microelectronics US 2026 </a:t>
+            </a:r>
+            <a:r>
+              <a:rPr lang="en-US" dirty="0"/>
+              <a:t> </a:t>
+            </a:r>
+            <a:r>
+              <a:rPr dirty="0"/>
+              <a:t>·  April 22</a:t>
             </a:r>
           </a:p>
         </p:txBody>
@@ -9224,7 +9246,7 @@
             </a:br>
             <a:r>
               <a:rPr dirty="0"/>
-              <a:t>It's time to consider the mind</a:t>
+              <a:t>It's time to give them the mind</a:t>
             </a:r>
           </a:p>
         </p:txBody>
